--- a/submission/02-presentation-deck/CashPilot_Presentation.pptx
+++ b/submission/02-presentation-deck/CashPilot_Presentation.pptx
@@ -118,42 +118,42 @@
   <p:extLst>
     <p:ext uri="{521415D9-36F7-43E2-AB2F-B90AF26B5E84}">
       <p14:sectionLst xmlns:p14="http://schemas.microsoft.com/office/powerpoint/2010/main">
-        <p14:section name="Opening" id="{af65604c-2410-7bc0-460e-87f754f38172}">
+        <p14:section name="Opening" id="{1cd34c28-04a1-2fc2-4e3f-60d1d5b27384}">
           <p14:sldIdLst>
             <p14:sldId id="256"/>
           </p14:sldIdLst>
         </p14:section>
-        <p14:section name="Problem" id="{14c802e9-52b0-387e-3a7f-7cd2fa40297f}">
+        <p14:section name="Problem" id="{086e1dcd-27f9-9b24-dd1d-29949f612b69}">
           <p14:sldIdLst>
             <p14:sldId id="257"/>
           </p14:sldIdLst>
         </p14:section>
-        <p14:section name="Task completion" id="{d0622d5c-7b63-df93-6b52-d5c2e9fec98d}">
+        <p14:section name="Task completion" id="{c45e2efa-2a4c-3a41-8e53-e6b09cbd224e}">
           <p14:sldIdLst>
             <p14:sldId id="258"/>
             <p14:sldId id="259"/>
             <p14:sldId id="260"/>
           </p14:sldIdLst>
         </p14:section>
-        <p14:section name="Innovation" id="{e1989815-ac5f-4edc-0a99-d5f8d936d4ab}">
+        <p14:section name="Innovation" id="{f684c172-1fd8-f7af-2f32-43eec7e5aa06}">
           <p14:sldIdLst>
             <p14:sldId id="261"/>
             <p14:sldId id="262"/>
           </p14:sldIdLst>
         </p14:section>
-        <p14:section name="Security" id="{67a347de-c938-f8f9-0bdc-cbb9f91b18fe}">
+        <p14:section name="Security" id="{159026d3-ff1e-1ef8-ce53-bba47852c9ac}">
           <p14:sldIdLst>
             <p14:sldId id="263"/>
             <p14:sldId id="264"/>
           </p14:sldIdLst>
         </p14:section>
-        <p14:section name="Evidence" id="{c686809f-7406-0d79-f846-02c71c1a76ad}">
+        <p14:section name="Evidence" id="{58ff3322-e74c-3a1f-8ce3-d70ffb277014}">
           <p14:sldIdLst>
             <p14:sldId id="265"/>
             <p14:sldId id="266"/>
           </p14:sldIdLst>
         </p14:section>
-        <p14:section name="Close" id="{2632dc5b-80c1-4680-0cf0-32d2da2b138d}">
+        <p14:section name="Close" id="{43eee6f6-e2a1-4117-e8a7-068be92b53ac}">
           <p14:sldIdLst>
             <p14:sldId id="267"/>
           </p14:sldIdLst>
@@ -650,7 +650,7 @@
           <a:p>
             <a:r>
               <a:rPr lang="en-US" dirty="0"/>
-              <a:t>Everything here is reproducible. 963 tests pass. The demo video drives the real UI against the live backend and the local model. When we upload a 94-transaction statement, the backend parses, scores and forecasts it in about a tenth of a second. Every claim in our documents points to a test, a log line or a file. (45 s)</a:t>
+              <a:t>Everything here is reproducible. 969 tests pass. The demo video drives the real UI against the live backend and the local model. When we upload a 94-transaction statement, the backend parses, scores and forecasts it in about a tenth of a second. Every claim in our documents points to a test, a log line or a file. (45 s)</a:t>
             </a:r>
             <a:endParaRPr lang="en-US" dirty="0"/>
           </a:p>
@@ -1530,7 +1530,7 @@
           <a:p>
             <a:r>
               <a:rPr lang="en-US" dirty="0"/>
-              <a:t>We did not just design this; we attacked it. Our sandbox replay runs 34 operations against the real API, including forged tokens, cross-tenant access, calling an execute route, smuggling an execute-now field, and a prompt injection asking to wire $50,000 sent with a valid token. Every one was refused, and the logs are in our execution evidence. Our self-assessment also lists 14 known risks openly, such as single-process storage and regex-only name masking. (60 s)</a:t>
+              <a:t>We did not just design this; we attacked it. Our sandbox replay runs 34 operations against the real API, including forged tokens, cross-tenant access, calling an execute route, smuggling an execute-now field, and a prompt injection asking to wire $50,000 sent with a valid token. Every one was refused, and the logs are in our execution evidence. Our self-assessment also lists 14 known risks openly, such as single-process storage and 30-day tokens with no revocation. (60 s)</a:t>
             </a:r>
             <a:endParaRPr lang="en-US" dirty="0"/>
           </a:p>
@@ -2558,7 +2558,7 @@
                 <a:ea typeface="Calibri" pitchFamily="34" charset="-122"/>
                 <a:cs typeface="Calibri" pitchFamily="34" charset="-120"/>
               </a:rPr>
-              <a:t>963</a:t>
+              <a:t>969</a:t>
             </a:r>
             <a:endParaRPr lang="en-US" sz="4800" dirty="0"/>
           </a:p>
@@ -2636,7 +2636,7 @@
                 <a:ea typeface="Calibri" pitchFamily="34" charset="-122"/>
                 <a:cs typeface="Calibri" pitchFamily="34" charset="-120"/>
               </a:rPr>
-              <a:t>unit 803 · integration 104 · security 54 (+1 skip) · e2e 2</a:t>
+              <a:t>unit 809 · integration 104 · security 54 (+1 skip) · e2e 2</a:t>
             </a:r>
             <a:endParaRPr lang="en-US" sz="1300" dirty="0"/>
           </a:p>
@@ -2990,7 +2990,7 @@
                 <a:ea typeface="Calibri" pitchFamily="34" charset="-122"/>
                 <a:cs typeface="Calibri" pitchFamily="34" charset="-120"/>
               </a:rPr>
-              <a:t>2:07</a:t>
+              <a:t>2:04</a:t>
             </a:r>
             <a:endParaRPr lang="en-US" sz="4800" dirty="0"/>
           </a:p>
@@ -3764,7 +3764,7 @@
                 <a:ea typeface="Calibri" pitchFamily="34" charset="-122"/>
                 <a:cs typeface="Calibri" pitchFamily="34" charset="-120"/>
               </a:rPr>
-              <a:t>Named-entity masking for cloud models; OIDC sign-in and token revocation</a:t>
+              <a:t>OIDC sign-in and token revocation; an NER model for one-word names</a:t>
             </a:r>
             <a:endParaRPr lang="en-US" sz="1500" dirty="0"/>
           </a:p>
@@ -7592,7 +7592,7 @@
                 <a:ea typeface="Calibri" pitchFamily="34" charset="-122"/>
                 <a:cs typeface="Calibri" pitchFamily="34" charset="-120"/>
               </a:rPr>
-              <a:t>Runs fully on the owner's computer with a 2B model; cloud providers (Gemini, Claude, OpenAI, DeepSeek, Groq) are optional and PII-masked</a:t>
+              <a:t>Runs fully on the owner's computer with a 2B model; cloud providers (Gemini, Claude, OpenAI, DeepSeek, Groq) are optional; account numbers and customer names are masked before text leaves</a:t>
             </a:r>
             <a:endParaRPr lang="en-US" sz="1500" dirty="0"/>
           </a:p>
